--- a/ppt/Python18-Web.pptx
+++ b/ppt/Python18-Web.pptx
@@ -3916,11 +3916,11 @@
             </a:r>
             <a:r>
               <a:rPr lang="fr-FR" dirty="0"/>
-              <a:t> f</a:t>
-            </a:r>
-            <a:r>
-              <a:rPr lang="fr-FR"/>
-              <a:t>lask</a:t>
+              <a:t> </a:t>
+            </a:r>
+            <a:r>
+              <a:rPr lang="fr-FR" dirty="0" err="1"/>
+              <a:t>flask</a:t>
             </a:r>
             <a:endParaRPr lang="fr-FR" dirty="0"/>
           </a:p>

--- a/ppt/Python18-Web.pptx
+++ b/ppt/Python18-Web.pptx
@@ -3828,6 +3828,14 @@
               <a:rPr lang="fr-FR" dirty="0"/>
               <a:t>Django</a:t>
             </a:r>
+          </a:p>
+          <a:p>
+            <a:pPr lvl="1"/>
+            <a:r>
+              <a:rPr lang="fr-FR" dirty="0" err="1"/>
+              <a:t>FastAPI</a:t>
+            </a:r>
+            <a:endParaRPr lang="fr-FR" dirty="0"/>
           </a:p>
         </p:txBody>
       </p:sp>
